--- a/RTT PAT 2025/Fase 2/Aanbieding/Aanbieding.pptx
+++ b/RTT PAT 2025/Fase 2/Aanbieding/Aanbieding.pptx
@@ -312,7 +312,7 @@
           <a:p>
             <a:fld id="{5BCAD085-E8A6-8845-BD4E-CB4CCA059FC4}" type="datetimeFigureOut">
               <a:rPr lang="en-US" smtClean="0"/>
-              <a:t>9/11/2025</a:t>
+              <a:t>9/12/2025</a:t>
             </a:fld>
             <a:endParaRPr lang="en-US"/>
           </a:p>
@@ -480,7 +480,7 @@
           <a:p>
             <a:fld id="{5BCAD085-E8A6-8845-BD4E-CB4CCA059FC4}" type="datetimeFigureOut">
               <a:rPr lang="en-US" smtClean="0"/>
-              <a:t>9/11/2025</a:t>
+              <a:t>9/12/2025</a:t>
             </a:fld>
             <a:endParaRPr lang="en-US"/>
           </a:p>
@@ -658,7 +658,7 @@
           <a:p>
             <a:fld id="{5BCAD085-E8A6-8845-BD4E-CB4CCA059FC4}" type="datetimeFigureOut">
               <a:rPr lang="en-US" smtClean="0"/>
-              <a:t>9/11/2025</a:t>
+              <a:t>9/12/2025</a:t>
             </a:fld>
             <a:endParaRPr lang="en-US"/>
           </a:p>
@@ -826,7 +826,7 @@
           <a:p>
             <a:fld id="{5BCAD085-E8A6-8845-BD4E-CB4CCA059FC4}" type="datetimeFigureOut">
               <a:rPr lang="en-US" smtClean="0"/>
-              <a:t>9/11/2025</a:t>
+              <a:t>9/12/2025</a:t>
             </a:fld>
             <a:endParaRPr lang="en-US"/>
           </a:p>
@@ -1071,7 +1071,7 @@
           <a:p>
             <a:fld id="{5BCAD085-E8A6-8845-BD4E-CB4CCA059FC4}" type="datetimeFigureOut">
               <a:rPr lang="en-US" smtClean="0"/>
-              <a:t>9/11/2025</a:t>
+              <a:t>9/12/2025</a:t>
             </a:fld>
             <a:endParaRPr lang="en-US"/>
           </a:p>
@@ -1356,7 +1356,7 @@
           <a:p>
             <a:fld id="{5BCAD085-E8A6-8845-BD4E-CB4CCA059FC4}" type="datetimeFigureOut">
               <a:rPr lang="en-US" smtClean="0"/>
-              <a:t>9/11/2025</a:t>
+              <a:t>9/12/2025</a:t>
             </a:fld>
             <a:endParaRPr lang="en-US"/>
           </a:p>
@@ -1775,7 +1775,7 @@
           <a:p>
             <a:fld id="{5BCAD085-E8A6-8845-BD4E-CB4CCA059FC4}" type="datetimeFigureOut">
               <a:rPr lang="en-US" smtClean="0"/>
-              <a:t>9/11/2025</a:t>
+              <a:t>9/12/2025</a:t>
             </a:fld>
             <a:endParaRPr lang="en-US"/>
           </a:p>
@@ -1892,7 +1892,7 @@
           <a:p>
             <a:fld id="{5BCAD085-E8A6-8845-BD4E-CB4CCA059FC4}" type="datetimeFigureOut">
               <a:rPr lang="en-US" smtClean="0"/>
-              <a:t>9/11/2025</a:t>
+              <a:t>9/12/2025</a:t>
             </a:fld>
             <a:endParaRPr lang="en-US"/>
           </a:p>
@@ -1987,7 +1987,7 @@
           <a:p>
             <a:fld id="{5BCAD085-E8A6-8845-BD4E-CB4CCA059FC4}" type="datetimeFigureOut">
               <a:rPr lang="en-US" smtClean="0"/>
-              <a:t>9/11/2025</a:t>
+              <a:t>9/12/2025</a:t>
             </a:fld>
             <a:endParaRPr lang="en-US"/>
           </a:p>
@@ -2262,7 +2262,7 @@
           <a:p>
             <a:fld id="{5BCAD085-E8A6-8845-BD4E-CB4CCA059FC4}" type="datetimeFigureOut">
               <a:rPr lang="en-US" smtClean="0"/>
-              <a:t>9/11/2025</a:t>
+              <a:t>9/12/2025</a:t>
             </a:fld>
             <a:endParaRPr lang="en-US"/>
           </a:p>
@@ -2514,7 +2514,7 @@
           <a:p>
             <a:fld id="{5BCAD085-E8A6-8845-BD4E-CB4CCA059FC4}" type="datetimeFigureOut">
               <a:rPr lang="en-US" smtClean="0"/>
-              <a:t>9/11/2025</a:t>
+              <a:t>9/12/2025</a:t>
             </a:fld>
             <a:endParaRPr lang="en-US"/>
           </a:p>
@@ -2725,7 +2725,7 @@
           <a:p>
             <a:fld id="{5BCAD085-E8A6-8845-BD4E-CB4CCA059FC4}" type="datetimeFigureOut">
               <a:rPr lang="en-US" smtClean="0"/>
-              <a:t>9/11/2025</a:t>
+              <a:t>9/12/2025</a:t>
             </a:fld>
             <a:endParaRPr lang="en-US"/>
           </a:p>
@@ -3100,6 +3100,36 @@
           <a:chExt cx="0" cy="0"/>
         </a:xfrm>
       </p:grpSpPr>
+      <p:pic>
+        <p:nvPicPr>
+          <p:cNvPr id="7" name="Picture 6" descr="A recycle symbol on a grey surface">
+            <a:extLst>
+              <a:ext uri="{FF2B5EF4-FFF2-40B4-BE49-F238E27FC236}">
+                <a16:creationId xmlns:a16="http://schemas.microsoft.com/office/drawing/2014/main" id="{877E5959-3A4D-75D1-2833-D0C3E8173C4E}"/>
+              </a:ext>
+            </a:extLst>
+          </p:cNvPr>
+          <p:cNvPicPr>
+            <a:picLocks noChangeAspect="1"/>
+          </p:cNvPicPr>
+          <p:nvPr/>
+        </p:nvPicPr>
+        <p:blipFill>
+          <a:blip r:embed="rId2"/>
+          <a:stretch>
+            <a:fillRect/>
+          </a:stretch>
+        </p:blipFill>
+        <p:spPr>
+          <a:xfrm>
+            <a:off x="0" y="1"/>
+            <a:ext cx="9144000" cy="3600450"/>
+          </a:xfrm>
+          <a:prstGeom prst="rect">
+            <a:avLst/>
+          </a:prstGeom>
+        </p:spPr>
+      </p:pic>
       <p:sp>
         <p:nvSpPr>
           <p:cNvPr id="2" name="Title 1"/>
@@ -3123,46 +3153,90 @@
               </a:defRPr>
             </a:pPr>
             <a:r>
-              <a:rPr dirty="0"/>
+              <a:rPr dirty="0">
+                <a:solidFill>
+                  <a:schemeClr val="accent1"/>
+                </a:solidFill>
+              </a:rPr>
               <a:t>E‑</a:t>
             </a:r>
             <a:r>
-              <a:rPr dirty="0" err="1"/>
+              <a:rPr dirty="0" err="1">
+                <a:solidFill>
+                  <a:schemeClr val="accent1"/>
+                </a:solidFill>
+              </a:rPr>
               <a:t>afvalbestuur</a:t>
             </a:r>
             <a:r>
-              <a:rPr dirty="0"/>
+              <a:rPr dirty="0">
+                <a:solidFill>
+                  <a:schemeClr val="accent1"/>
+                </a:solidFill>
+              </a:rPr>
               <a:t> – my pad </a:t>
             </a:r>
             <a:r>
-              <a:rPr dirty="0" err="1"/>
+              <a:rPr dirty="0" err="1">
+                <a:solidFill>
+                  <a:schemeClr val="accent1"/>
+                </a:solidFill>
+              </a:rPr>
               <a:t>na</a:t>
             </a:r>
             <a:r>
-              <a:rPr dirty="0"/>
+              <a:rPr dirty="0">
+                <a:solidFill>
+                  <a:schemeClr val="accent1"/>
+                </a:solidFill>
+              </a:rPr>
               <a:t> ’n </a:t>
             </a:r>
             <a:r>
-              <a:rPr dirty="0" err="1"/>
+              <a:rPr dirty="0" err="1">
+                <a:solidFill>
+                  <a:schemeClr val="accent1"/>
+                </a:solidFill>
+              </a:rPr>
               <a:t>groener</a:t>
             </a:r>
             <a:r>
-              <a:rPr dirty="0"/>
-              <a:t> </a:t>
-            </a:r>
-            <a:r>
-              <a:rPr dirty="0" err="1"/>
+              <a:rPr dirty="0">
+                <a:solidFill>
+                  <a:schemeClr val="accent1"/>
+                </a:solidFill>
+              </a:rPr>
+              <a:t> </a:t>
+            </a:r>
+            <a:r>
+              <a:rPr dirty="0" err="1">
+                <a:solidFill>
+                  <a:schemeClr val="accent1"/>
+                </a:solidFill>
+              </a:rPr>
               <a:t>digitale</a:t>
             </a:r>
             <a:r>
-              <a:rPr dirty="0"/>
-              <a:t> </a:t>
-            </a:r>
-            <a:r>
-              <a:rPr dirty="0" err="1"/>
+              <a:rPr dirty="0">
+                <a:solidFill>
+                  <a:schemeClr val="accent1"/>
+                </a:solidFill>
+              </a:rPr>
+              <a:t> </a:t>
+            </a:r>
+            <a:r>
+              <a:rPr dirty="0" err="1">
+                <a:solidFill>
+                  <a:schemeClr val="accent1"/>
+                </a:solidFill>
+              </a:rPr>
               <a:t>toekoms</a:t>
             </a:r>
-            <a:endParaRPr dirty="0"/>
+            <a:endParaRPr dirty="0">
+              <a:solidFill>
+                <a:schemeClr val="accent1"/>
+              </a:solidFill>
+            </a:endParaRPr>
           </a:p>
         </p:txBody>
       </p:sp>
@@ -3512,6 +3586,36 @@
           <a:chExt cx="0" cy="0"/>
         </a:xfrm>
       </p:grpSpPr>
+      <p:pic>
+        <p:nvPicPr>
+          <p:cNvPr id="7" name="Picture 6" descr="A pile of electronic waste&#10;&#10;AI-generated content may be incorrect.">
+            <a:extLst>
+              <a:ext uri="{FF2B5EF4-FFF2-40B4-BE49-F238E27FC236}">
+                <a16:creationId xmlns:a16="http://schemas.microsoft.com/office/drawing/2014/main" id="{E30AE63A-FF86-11A8-85BE-AFCD73A1F2C8}"/>
+              </a:ext>
+            </a:extLst>
+          </p:cNvPr>
+          <p:cNvPicPr>
+            <a:picLocks noChangeAspect="1"/>
+          </p:cNvPicPr>
+          <p:nvPr/>
+        </p:nvPicPr>
+        <p:blipFill>
+          <a:blip r:embed="rId2"/>
+          <a:stretch>
+            <a:fillRect/>
+          </a:stretch>
+        </p:blipFill>
+        <p:spPr>
+          <a:xfrm>
+            <a:off x="0" y="83513"/>
+            <a:ext cx="9144000" cy="1143001"/>
+          </a:xfrm>
+          <a:prstGeom prst="rect">
+            <a:avLst/>
+          </a:prstGeom>
+        </p:spPr>
+      </p:pic>
       <p:sp>
         <p:nvSpPr>
           <p:cNvPr id="2" name="Title 1"/>
@@ -3535,10 +3639,18 @@
               </a:defRPr>
             </a:pPr>
             <a:r>
-              <a:rPr dirty="0" err="1"/>
+              <a:rPr dirty="0" err="1">
+                <a:solidFill>
+                  <a:srgbClr val="FFFF00"/>
+                </a:solidFill>
+              </a:rPr>
               <a:t>Gevolgtrekking</a:t>
             </a:r>
-            <a:endParaRPr dirty="0"/>
+            <a:endParaRPr dirty="0">
+              <a:solidFill>
+                <a:srgbClr val="FFFF00"/>
+              </a:solidFill>
+            </a:endParaRPr>
           </a:p>
         </p:txBody>
       </p:sp>
@@ -5833,6 +5945,36 @@
           </a:p>
         </p:txBody>
       </p:sp>
+      <p:pic>
+        <p:nvPicPr>
+          <p:cNvPr id="7" name="Picture 6" descr="A graph with numbers and a number of years&#10;&#10;AI-generated content may be incorrect.">
+            <a:extLst>
+              <a:ext uri="{FF2B5EF4-FFF2-40B4-BE49-F238E27FC236}">
+                <a16:creationId xmlns:a16="http://schemas.microsoft.com/office/drawing/2014/main" id="{8A43073E-5EFD-B522-7FE5-B926FC2ECD8C}"/>
+              </a:ext>
+            </a:extLst>
+          </p:cNvPr>
+          <p:cNvPicPr>
+            <a:picLocks noChangeAspect="1"/>
+          </p:cNvPicPr>
+          <p:nvPr/>
+        </p:nvPicPr>
+        <p:blipFill>
+          <a:blip r:embed="rId2"/>
+          <a:stretch>
+            <a:fillRect/>
+          </a:stretch>
+        </p:blipFill>
+        <p:spPr>
+          <a:xfrm>
+            <a:off x="689547" y="4175294"/>
+            <a:ext cx="7764905" cy="2165012"/>
+          </a:xfrm>
+          <a:prstGeom prst="rect">
+            <a:avLst/>
+          </a:prstGeom>
+        </p:spPr>
+      </p:pic>
     </p:spTree>
   </p:cSld>
   <p:clrMapOvr>
@@ -6351,6 +6493,17 @@
               <a:rPr dirty="0"/>
               <a:t>.</a:t>
             </a:r>
+            <a:endParaRPr lang="en-US" dirty="0"/>
+          </a:p>
+          <a:p>
+            <a:pPr>
+              <a:defRPr sz="2100">
+                <a:solidFill>
+                  <a:srgbClr val="222222"/>
+                </a:solidFill>
+              </a:defRPr>
+            </a:pPr>
+            <a:endParaRPr dirty="0"/>
           </a:p>
         </p:txBody>
       </p:sp>
@@ -7652,9 +7805,50 @@
               <a:rPr dirty="0"/>
               <a:t>.</a:t>
             </a:r>
+            <a:endParaRPr lang="en-US" dirty="0"/>
+          </a:p>
+          <a:p>
+            <a:pPr>
+              <a:defRPr sz="2100">
+                <a:solidFill>
+                  <a:srgbClr val="222222"/>
+                </a:solidFill>
+              </a:defRPr>
+            </a:pPr>
+            <a:endParaRPr dirty="0"/>
           </a:p>
         </p:txBody>
       </p:sp>
+      <p:pic>
+        <p:nvPicPr>
+          <p:cNvPr id="5" name="Picture 4" descr="A blue circle with green dots and white text">
+            <a:extLst>
+              <a:ext uri="{FF2B5EF4-FFF2-40B4-BE49-F238E27FC236}">
+                <a16:creationId xmlns:a16="http://schemas.microsoft.com/office/drawing/2014/main" id="{83419F68-98B6-BE1E-756A-2547E0CDCCAD}"/>
+              </a:ext>
+            </a:extLst>
+          </p:cNvPr>
+          <p:cNvPicPr>
+            <a:picLocks noChangeAspect="1"/>
+          </p:cNvPicPr>
+          <p:nvPr/>
+        </p:nvPicPr>
+        <p:blipFill>
+          <a:blip r:embed="rId2"/>
+          <a:stretch>
+            <a:fillRect/>
+          </a:stretch>
+        </p:blipFill>
+        <p:spPr>
+          <a:xfrm>
+            <a:off x="457200" y="3154362"/>
+            <a:ext cx="8134350" cy="3429000"/>
+          </a:xfrm>
+          <a:prstGeom prst="rect">
+            <a:avLst/>
+          </a:prstGeom>
+        </p:spPr>
+      </p:pic>
     </p:spTree>
   </p:cSld>
   <p:clrMapOvr>
